--- a/matematika-transformasi-geometri-kelompok4/SLIDE_PRESENTASI_KELOMPOK_4.pptx
+++ b/matematika-transformasi-geometri-kelompok4/SLIDE_PRESENTASI_KELOMPOK_4.pptx
@@ -4457,7 +4457,7 @@
               </a:defRPr>
             </a:pPr>
             <a:r>
-              <a:t>• Titik E (10.4, 11.7) — Pinggang kanan terluar dari bingkai perisai.</a:t>
+              <a:t>• Titik B (10.4, 11.7) — Pinggang kanan terluar dari bingkai perisai.</a:t>
             </a:r>
           </a:p>
           <a:p>
@@ -4487,7 +4487,7 @@
               </a:defRPr>
             </a:pPr>
             <a:r>
-              <a:t>• Titik B (3.5, 13.0) — Bahu atas kiri yang sejajar mendatar dengan titik C.</a:t>
+              <a:t>• Titik D (3.5, 13.0) — Bahu atas kiri yang sejajar mendatar dengan titik C.</a:t>
             </a:r>
           </a:p>
           <a:p>
@@ -4502,7 +4502,7 @@
               </a:defRPr>
             </a:pPr>
             <a:r>
-              <a:t>• Titik D (1.6, 11.7) — Pinggang kiri terluar (simetris terhadap titik E).</a:t>
+              <a:t>• Titik E (1.6, 11.7) — Pinggang kiri terluar (simetris terhadap titik B).</a:t>
             </a:r>
           </a:p>
         </p:txBody>
@@ -4571,7 +4571,7 @@
               </a:defRPr>
             </a:pPr>
             <a:r>
-              <a:t>Untuk membentuk sayap perisai yang melengkung indah dari A(6, 1.8) ke E(10.4, 11.7), digunakan 3 titik kontrol penarik:</a:t>
+              <a:t>Untuk membentuk sayap perisai yang melengkung indah dari A(6, 1.8) ke B(10.4, 11.7), digunakan 3 titik kontrol penarik:</a:t>
             </a:r>
           </a:p>
           <a:p>
@@ -4628,7 +4628,7 @@
             </a:r>
             <a:br/>
             <a:r>
-              <a:t>   Mengarahkan garis masuk mulus ke pinggang titik E.</a:t>
+              <a:t>   Mengarahkan garis masuk mulus ke pinggang titik B.</a:t>
             </a:r>
           </a:p>
           <a:p>
@@ -5361,7 +5361,7 @@
                         </a:defRPr>
                       </a:pPr>
                       <a:r>
-                        <a:t>Titik E (Pinggang Kanan)</a:t>
+                        <a:t>Titik B (Pinggang Kanan)</a:t>
                       </a:r>
                     </a:p>
                   </a:txBody>
@@ -5595,7 +5595,7 @@
                         </a:defRPr>
                       </a:pPr>
                       <a:r>
-                        <a:t>Titik B (Bahu Kiri)</a:t>
+                        <a:t>Titik D (Bahu Kiri)</a:t>
                       </a:r>
                     </a:p>
                   </a:txBody>
@@ -5712,7 +5712,7 @@
                         </a:defRPr>
                       </a:pPr>
                       <a:r>
-                        <a:t>Titik D (Pinggang Kiri)</a:t>
+                        <a:t>Titik E (Pinggang Kiri)</a:t>
                       </a:r>
                     </a:p>
                   </a:txBody>
@@ -5974,7 +5974,7 @@
               </a:defRPr>
             </a:pPr>
             <a:r>
-              <a:t>• Sisi A ke E = √[ (4.4)² + (9.9)² ] = √117.37 ≈ 10.834 satuan</a:t>
+              <a:t>• Sisi A ke B = √[ (4.4)² + (9.9)² ] = √117.37 ≈ 10.834 satuan</a:t>
             </a:r>
           </a:p>
           <a:p>
@@ -5989,7 +5989,7 @@
               </a:defRPr>
             </a:pPr>
             <a:r>
-              <a:t>• Sisi E ke C = √[ (-1.9)² + (1.3)² ] = √5.30 ≈ 2.302 satuan</a:t>
+              <a:t>• Sisi B ke C = √[ (-1.9)² + (1.3)² ] = √5.30 ≈ 2.302 satuan</a:t>
             </a:r>
           </a:p>
           <a:p>
@@ -6004,7 +6004,7 @@
               </a:defRPr>
             </a:pPr>
             <a:r>
-              <a:t>• Sisi C ke B = √[ (-5.0)² + (0)² ] = √25.00 = 5.000 satuan</a:t>
+              <a:t>• Sisi C ke D = √[ (-5.0)² + (0)² ] = √25.00 = 5.000 satuan</a:t>
             </a:r>
           </a:p>
           <a:p>
@@ -6019,7 +6019,7 @@
               </a:defRPr>
             </a:pPr>
             <a:r>
-              <a:t>• Sisi B ke D = √[ (-1.9)² + (-1.3)² ] = √5.30 ≈ 2.302 satuan</a:t>
+              <a:t>• Sisi D ke E = √[ (-1.9)² + (-1.3)² ] = √5.30 ≈ 2.302 satuan</a:t>
             </a:r>
           </a:p>
           <a:p>
@@ -6034,7 +6034,7 @@
               </a:defRPr>
             </a:pPr>
             <a:r>
-              <a:t>• Sisi D ke A = √[ (4.4)² + (-9.9)² ] = √117.37 ≈ 10.834 satuan</a:t>
+              <a:t>• Sisi E ke A = √[ (4.4)² + (-9.9)² ] = √117.37 ≈ 10.834 satuan</a:t>
             </a:r>
           </a:p>
           <a:p>
@@ -6133,7 +6133,7 @@
               </a:defRPr>
             </a:pPr>
             <a:r>
-              <a:t>• Perkalian Silang A ke E = (6.0 × 11.7) - (10.4 × 1.8) = +51.48</a:t>
+              <a:t>• Perkalian Silang A ke B = (6.0 × 11.7) - (10.4 × 1.8) = +51.48</a:t>
             </a:r>
           </a:p>
           <a:p>
@@ -6148,7 +6148,7 @@
               </a:defRPr>
             </a:pPr>
             <a:r>
-              <a:t>• Perkalian Silang E ke C = (10.4 × 13.0) - (8.5 × 11.7) = +35.75</a:t>
+              <a:t>• Perkalian Silang B ke C = (10.4 × 13.0) - (8.5 × 11.7) = +35.75</a:t>
             </a:r>
           </a:p>
           <a:p>
@@ -6163,7 +6163,7 @@
               </a:defRPr>
             </a:pPr>
             <a:r>
-              <a:t>• Perkalian Silang C ke B = (8.5 × 13.0) - (3.5 × 13.0) = +65.00</a:t>
+              <a:t>• Perkalian Silang C ke D = (8.5 × 13.0) - (3.5 × 13.0) = +65.00</a:t>
             </a:r>
           </a:p>
           <a:p>
@@ -6178,7 +6178,7 @@
               </a:defRPr>
             </a:pPr>
             <a:r>
-              <a:t>• Perkalian Silang B ke D = (3.5 × 11.7) - (1.6 × 13.0) = +20.15</a:t>
+              <a:t>• Perkalian Silang D ke E = (3.5 × 11.7) - (1.6 × 13.0) = +20.15</a:t>
             </a:r>
           </a:p>
           <a:p>
@@ -6193,7 +6193,7 @@
               </a:defRPr>
             </a:pPr>
             <a:r>
-              <a:t>• Perkalian Silang D ke A = (1.6 × 1.8) - (6.0 × 11.7) = -67.32</a:t>
+              <a:t>• Perkalian Silang E ke A = (1.6 × 1.8) - (6.0 × 11.7) = -67.32</a:t>
             </a:r>
           </a:p>
           <a:p>
